--- a/units/unit07_loopopt/loopopt.pptx
+++ b/units/unit07_loopopt/loopopt.pptx
@@ -4082,7 +4082,7 @@
           <a:p>
             <a:r>
               <a:rPr lang="en-US"/>
-              <a:t>EL-GY 9463:  Introduction to Hardware Design</a:t>
+              <a:t>ECE-GY 6463:  Advanced Hardware Design</a:t>
             </a:r>
           </a:p>
           <a:p>
